--- a/manuscript/var_granger_figures_en.pptx
+++ b/manuscript/var_granger_figures_en.pptx
@@ -334,7 +334,7 @@
           <a:p>
             <a:fld id="{C1FF6DA9-008F-8B48-92A6-B652298478BF}" type="slidenum">
               <a:rPr lang="en-US" smtClean="0"/>
-              <a:t>‹#›</a:t>
+              <a:t>#</a:t>
             </a:fld>
             <a:endParaRPr lang="en-US"/>
           </a:p>
@@ -504,7 +504,7 @@
           <a:p>
             <a:fld id="{C1FF6DA9-008F-8B48-92A6-B652298478BF}" type="slidenum">
               <a:rPr lang="en-US" smtClean="0"/>
-              <a:t>‹#›</a:t>
+              <a:t>#</a:t>
             </a:fld>
             <a:endParaRPr lang="en-US"/>
           </a:p>
@@ -684,7 +684,7 @@
           <a:p>
             <a:fld id="{C1FF6DA9-008F-8B48-92A6-B652298478BF}" type="slidenum">
               <a:rPr lang="en-US" smtClean="0"/>
-              <a:t>‹#›</a:t>
+              <a:t>#</a:t>
             </a:fld>
             <a:endParaRPr lang="en-US"/>
           </a:p>
@@ -854,7 +854,7 @@
           <a:p>
             <a:fld id="{C1FF6DA9-008F-8B48-92A6-B652298478BF}" type="slidenum">
               <a:rPr lang="en-US" smtClean="0"/>
-              <a:t>‹#›</a:t>
+              <a:t>#</a:t>
             </a:fld>
             <a:endParaRPr lang="en-US"/>
           </a:p>
@@ -1100,7 +1100,7 @@
           <a:p>
             <a:fld id="{C1FF6DA9-008F-8B48-92A6-B652298478BF}" type="slidenum">
               <a:rPr lang="en-US" smtClean="0"/>
-              <a:t>‹#›</a:t>
+              <a:t>#</a:t>
             </a:fld>
             <a:endParaRPr lang="en-US"/>
           </a:p>
@@ -1388,7 +1388,7 @@
           <a:p>
             <a:fld id="{C1FF6DA9-008F-8B48-92A6-B652298478BF}" type="slidenum">
               <a:rPr lang="en-US" smtClean="0"/>
-              <a:t>‹#›</a:t>
+              <a:t>#</a:t>
             </a:fld>
             <a:endParaRPr lang="en-US"/>
           </a:p>
@@ -1810,7 +1810,7 @@
           <a:p>
             <a:fld id="{C1FF6DA9-008F-8B48-92A6-B652298478BF}" type="slidenum">
               <a:rPr lang="en-US" smtClean="0"/>
-              <a:t>‹#›</a:t>
+              <a:t>#</a:t>
             </a:fld>
             <a:endParaRPr lang="en-US"/>
           </a:p>
@@ -1928,7 +1928,7 @@
           <a:p>
             <a:fld id="{C1FF6DA9-008F-8B48-92A6-B652298478BF}" type="slidenum">
               <a:rPr lang="en-US" smtClean="0"/>
-              <a:t>‹#›</a:t>
+              <a:t>#</a:t>
             </a:fld>
             <a:endParaRPr lang="en-US"/>
           </a:p>
@@ -2023,7 +2023,7 @@
           <a:p>
             <a:fld id="{C1FF6DA9-008F-8B48-92A6-B652298478BF}" type="slidenum">
               <a:rPr lang="en-US" smtClean="0"/>
-              <a:t>‹#›</a:t>
+              <a:t>#</a:t>
             </a:fld>
             <a:endParaRPr lang="en-US"/>
           </a:p>
@@ -2300,7 +2300,7 @@
           <a:p>
             <a:fld id="{C1FF6DA9-008F-8B48-92A6-B652298478BF}" type="slidenum">
               <a:rPr lang="en-US" smtClean="0"/>
-              <a:t>‹#›</a:t>
+              <a:t>#</a:t>
             </a:fld>
             <a:endParaRPr lang="en-US"/>
           </a:p>
@@ -2553,7 +2553,7 @@
           <a:p>
             <a:fld id="{C1FF6DA9-008F-8B48-92A6-B652298478BF}" type="slidenum">
               <a:rPr lang="en-US" smtClean="0"/>
-              <a:t>‹#›</a:t>
+              <a:t>#</a:t>
             </a:fld>
             <a:endParaRPr lang="en-US"/>
           </a:p>
@@ -2802,7 +2802,7 @@
           <a:p>
             <a:fld id="{C1FF6DA9-008F-8B48-92A6-B652298478BF}" type="slidenum">
               <a:rPr lang="en-US" smtClean="0"/>
-              <a:t>‹#›</a:t>
+              <a:t>#</a:t>
             </a:fld>
             <a:endParaRPr lang="en-US"/>
           </a:p>
@@ -2852,7 +2852,7 @@
           <a:spcPct val="20000"/>
         </a:spcBef>
         <a:buFont typeface="Arial"/>
-        <a:buChar char="•"/>
+        <a:buChar char="*"/>
         <a:defRPr sz="3200" kern="1200">
           <a:solidFill>
             <a:schemeClr val="tx1"/>
@@ -2867,7 +2867,7 @@
           <a:spcPct val="20000"/>
         </a:spcBef>
         <a:buFont typeface="Arial"/>
-        <a:buChar char="–"/>
+        <a:buChar char="-"/>
         <a:defRPr sz="2800" kern="1200">
           <a:solidFill>
             <a:schemeClr val="tx1"/>
@@ -2882,7 +2882,7 @@
           <a:spcPct val="20000"/>
         </a:spcBef>
         <a:buFont typeface="Arial"/>
-        <a:buChar char="•"/>
+        <a:buChar char="*"/>
         <a:defRPr sz="2400" kern="1200">
           <a:solidFill>
             <a:schemeClr val="tx1"/>
@@ -2897,7 +2897,7 @@
           <a:spcPct val="20000"/>
         </a:spcBef>
         <a:buFont typeface="Arial"/>
-        <a:buChar char="–"/>
+        <a:buChar char="-"/>
         <a:defRPr sz="2000" kern="1200">
           <a:solidFill>
             <a:schemeClr val="tx1"/>
@@ -2912,7 +2912,7 @@
           <a:spcPct val="20000"/>
         </a:spcBef>
         <a:buFont typeface="Arial"/>
-        <a:buChar char="»"/>
+        <a:buChar char="&gt;&gt;"/>
         <a:defRPr sz="2000" kern="1200">
           <a:solidFill>
             <a:schemeClr val="tx1"/>
@@ -2927,7 +2927,7 @@
           <a:spcPct val="20000"/>
         </a:spcBef>
         <a:buFont typeface="Arial"/>
-        <a:buChar char="•"/>
+        <a:buChar char="*"/>
         <a:defRPr sz="2000" kern="1200">
           <a:solidFill>
             <a:schemeClr val="tx1"/>
@@ -2942,7 +2942,7 @@
           <a:spcPct val="20000"/>
         </a:spcBef>
         <a:buFont typeface="Arial"/>
-        <a:buChar char="•"/>
+        <a:buChar char="*"/>
         <a:defRPr sz="2000" kern="1200">
           <a:solidFill>
             <a:schemeClr val="tx1"/>
@@ -2957,7 +2957,7 @@
           <a:spcPct val="20000"/>
         </a:spcBef>
         <a:buFont typeface="Arial"/>
-        <a:buChar char="•"/>
+        <a:buChar char="*"/>
         <a:defRPr sz="2000" kern="1200">
           <a:solidFill>
             <a:schemeClr val="tx1"/>
@@ -2972,7 +2972,7 @@
           <a:spcPct val="20000"/>
         </a:spcBef>
         <a:buFont typeface="Arial"/>
-        <a:buChar char="•"/>
+        <a:buChar char="*"/>
         <a:defRPr sz="2000" kern="1200">
           <a:solidFill>
             <a:schemeClr val="tx1"/>
@@ -3173,7 +3173,7 @@
               <a:defRPr sz="1200" i="1"/>
             </a:pPr>
             <a:r>
-              <a:t>JMSR mandatory reports (2015–2025) and litigation statistics (2004–2023) for the 12 core specialties.</a:t>
+              <a:t>JMSR mandatory reports (2015-2025) and litigation statistics (2004-2023) for the 12 core specialties.</a:t>
             </a:r>
           </a:p>
         </p:txBody>
@@ -3485,7 +3485,7 @@
               <a:defRPr sz="1200" i="1"/>
             </a:pPr>
             <a:r>
-              <a:t>Physician and facility count forecasts (2024–2033) for general surgery, obstetrics &amp; gynaecology, and internal medicine.</a:t>
+              <a:t>Physician and facility count forecasts (2024-2033) for general surgery, obstetrics &amp; gynaecology, and internal medicine.</a:t>
             </a:r>
           </a:p>
         </p:txBody>
@@ -3648,10 +3648,10 @@
         <a:latin typeface="Calibri"/>
         <a:ea typeface=""/>
         <a:cs typeface=""/>
-        <a:font script="Jpan" typeface="ＭＳ Ｐゴシック"/>
-        <a:font script="Hang" typeface="맑은 고딕"/>
-        <a:font script="Hans" typeface="宋体"/>
-        <a:font script="Hant" typeface="新細明體"/>
+        <a:font script="Jpan" typeface="MS PGothic"/>
+        <a:font script="Hang" typeface="Malgun Gothic"/>
+        <a:font script="Hans" typeface="SimSun"/>
+        <a:font script="Hant" typeface="PMingLiU"/>
         <a:font script="Arab" typeface="Times New Roman"/>
         <a:font script="Hebr" typeface="Times New Roman"/>
         <a:font script="Thai" typeface="Angsana New"/>
@@ -3683,10 +3683,10 @@
         <a:latin typeface="Calibri"/>
         <a:ea typeface=""/>
         <a:cs typeface=""/>
-        <a:font script="Jpan" typeface="ＭＳ Ｐゴシック"/>
-        <a:font script="Hang" typeface="맑은 고딕"/>
-        <a:font script="Hans" typeface="宋体"/>
-        <a:font script="Hant" typeface="新細明體"/>
+        <a:font script="Jpan" typeface="MS PGothic"/>
+        <a:font script="Hang" typeface="Malgun Gothic"/>
+        <a:font script="Hans" typeface="SimSun"/>
+        <a:font script="Hant" typeface="PMingLiU"/>
         <a:font script="Arab" typeface="Arial"/>
         <a:font script="Hebr" typeface="Arial"/>
         <a:font script="Thai" typeface="Cordia New"/>
